--- a/model-training-face-recognition.pptx
+++ b/model-training-face-recognition.pptx
@@ -11031,6 +11031,7 @@
               </a:defRPr>
             </a:pPr>
             <a:r>
+              <a:rPr dirty="0"/>
               <a:t>DECK 1: MODEL TRAINING</a:t>
             </a:r>
           </a:p>
@@ -11074,6 +11075,7 @@
               </a:defRPr>
             </a:pPr>
             <a:r>
+              <a:rPr dirty="0"/>
               <a:t>Teaching a Computer to Recognize Faces</a:t>
             </a:r>
           </a:p>
@@ -11117,6 +11119,7 @@
               </a:defRPr>
             </a:pPr>
             <a:r>
+              <a:rPr dirty="0"/>
               <a:t>Model training concepts for the AI &amp; Semiconductor Summer Institute</a:t>
             </a:r>
           </a:p>
@@ -15496,6 +15499,7 @@
               </a:defRPr>
             </a:pPr>
             <a:r>
+              <a:rPr dirty="0"/>
               <a:t>Face recognition needs a flexible database, not a fixed class list.</a:t>
             </a:r>
           </a:p>
